--- a/reports/acdr2026_staff_deployment/ACDR2026_配席表_1001.pptx
+++ b/reports/acdr2026_staff_deployment/ACDR2026_配席表_1001.pptx
@@ -3301,37 +3301,6 @@
           </a:p>
         </p:txBody>
       </p:sp>
-      <p:pic>
-        <p:nvPicPr>
-          <p:cNvPr id="5" name="図 4">
-            <a:extLst>
-              <a:ext uri="{FF2B5EF4-FFF2-40B4-BE49-F238E27FC236}">
-                <a16:creationId xmlns:a16="http://schemas.microsoft.com/office/drawing/2014/main" id="{4A69816B-B19F-121D-F91E-C2FE104CCFFC}"/>
-              </a:ext>
-            </a:extLst>
-          </p:cNvPr>
-          <p:cNvPicPr>
-            <a:picLocks noChangeAspect="1"/>
-          </p:cNvPicPr>
-          <p:nvPr/>
-        </p:nvPicPr>
-        <p:blipFill>
-          <a:blip r:embed="rId2"/>
-          <a:srcRect l="31222" r="15222"/>
-          <a:stretch>
-            <a:fillRect/>
-          </a:stretch>
-        </p:blipFill>
-        <p:spPr>
-          <a:xfrm>
-            <a:off x="1592580" y="452000"/>
-            <a:ext cx="3672840" cy="2921240"/>
-          </a:xfrm>
-          <a:prstGeom prst="rect">
-            <a:avLst/>
-          </a:prstGeom>
-        </p:spPr>
-      </p:pic>
       <p:sp>
         <p:nvSpPr>
           <p:cNvPr id="26" name="正方形/長方形 25">
@@ -9734,7 +9703,7 @@
         </p:nvSpPr>
         <p:spPr>
           <a:xfrm>
-            <a:off x="811090" y="3527239"/>
+            <a:off x="5256000" y="4392000"/>
             <a:ext cx="409366" cy="80791"/>
           </a:xfrm>
           <a:prstGeom prst="rect">
@@ -13685,1455 +13654,6 @@
       </p:sp>
       <p:sp>
         <p:nvSpPr>
-          <p:cNvPr id="223" name="正方形/長方形 180">
-            <a:extLst>
-              <a:ext uri="{FF2B5EF4-FFF2-40B4-BE49-F238E27FC236}">
-                <a16:creationId xmlns:a16="http://schemas.microsoft.com/office/drawing/2014/main" id="{DCFFE979-6827-DEBF-E7A3-737DB0B82105}"/>
-              </a:ext>
-            </a:extLst>
-          </p:cNvPr>
-          <p:cNvSpPr/>
-          <p:nvPr/>
-        </p:nvSpPr>
-        <p:spPr>
-          <a:xfrm>
-            <a:off x="1843944" y="8635396"/>
-            <a:ext cx="436816" cy="192003"/>
-          </a:xfrm>
-          <a:prstGeom prst="rect">
-            <a:avLst/>
-          </a:prstGeom>
-          <a:solidFill>
-            <a:srgbClr val="4BACC6"/>
-          </a:solidFill>
-          <a:ln w="25400" cap="flat" cmpd="sng" algn="ctr">
-            <a:solidFill>
-              <a:sysClr val="windowText" lastClr="000000"/>
-            </a:solidFill>
-            <a:prstDash val="solid"/>
-          </a:ln>
-          <a:effectLst/>
-        </p:spPr>
-        <p:txBody>
-          <a:bodyPr lIns="0" tIns="0" rIns="0" bIns="0" rtlCol="0" anchor="ctr" anchorCtr="1"/>
-          <a:lstStyle>
-            <a:lvl1pPr marL="0" indent="0">
-              <a:defRPr sz="1100">
-                <a:solidFill>
-                  <a:schemeClr val="lt1"/>
-                </a:solidFill>
-                <a:latin typeface="+mn-lt"/>
-                <a:ea typeface="+mn-ea"/>
-                <a:cs typeface="+mn-cs"/>
-              </a:defRPr>
-            </a:lvl1pPr>
-            <a:lvl2pPr marL="457200" indent="0">
-              <a:defRPr sz="1100">
-                <a:solidFill>
-                  <a:schemeClr val="lt1"/>
-                </a:solidFill>
-                <a:latin typeface="+mn-lt"/>
-                <a:ea typeface="+mn-ea"/>
-                <a:cs typeface="+mn-cs"/>
-              </a:defRPr>
-            </a:lvl2pPr>
-            <a:lvl3pPr marL="914400" indent="0">
-              <a:defRPr sz="1100">
-                <a:solidFill>
-                  <a:schemeClr val="lt1"/>
-                </a:solidFill>
-                <a:latin typeface="+mn-lt"/>
-                <a:ea typeface="+mn-ea"/>
-                <a:cs typeface="+mn-cs"/>
-              </a:defRPr>
-            </a:lvl3pPr>
-            <a:lvl4pPr marL="1371600" indent="0">
-              <a:defRPr sz="1100">
-                <a:solidFill>
-                  <a:schemeClr val="lt1"/>
-                </a:solidFill>
-                <a:latin typeface="+mn-lt"/>
-                <a:ea typeface="+mn-ea"/>
-                <a:cs typeface="+mn-cs"/>
-              </a:defRPr>
-            </a:lvl4pPr>
-            <a:lvl5pPr marL="1828800" indent="0">
-              <a:defRPr sz="1100">
-                <a:solidFill>
-                  <a:schemeClr val="lt1"/>
-                </a:solidFill>
-                <a:latin typeface="+mn-lt"/>
-                <a:ea typeface="+mn-ea"/>
-                <a:cs typeface="+mn-cs"/>
-              </a:defRPr>
-            </a:lvl5pPr>
-            <a:lvl6pPr marL="2286000" indent="0">
-              <a:defRPr sz="1100">
-                <a:solidFill>
-                  <a:schemeClr val="lt1"/>
-                </a:solidFill>
-                <a:latin typeface="+mn-lt"/>
-                <a:ea typeface="+mn-ea"/>
-                <a:cs typeface="+mn-cs"/>
-              </a:defRPr>
-            </a:lvl6pPr>
-            <a:lvl7pPr marL="2743200" indent="0">
-              <a:defRPr sz="1100">
-                <a:solidFill>
-                  <a:schemeClr val="lt1"/>
-                </a:solidFill>
-                <a:latin typeface="+mn-lt"/>
-                <a:ea typeface="+mn-ea"/>
-                <a:cs typeface="+mn-cs"/>
-              </a:defRPr>
-            </a:lvl7pPr>
-            <a:lvl8pPr marL="3200400" indent="0">
-              <a:defRPr sz="1100">
-                <a:solidFill>
-                  <a:schemeClr val="lt1"/>
-                </a:solidFill>
-                <a:latin typeface="+mn-lt"/>
-                <a:ea typeface="+mn-ea"/>
-                <a:cs typeface="+mn-cs"/>
-              </a:defRPr>
-            </a:lvl8pPr>
-            <a:lvl9pPr marL="3657600" indent="0">
-              <a:defRPr sz="1100">
-                <a:solidFill>
-                  <a:schemeClr val="lt1"/>
-                </a:solidFill>
-                <a:latin typeface="+mn-lt"/>
-                <a:ea typeface="+mn-ea"/>
-                <a:cs typeface="+mn-cs"/>
-              </a:defRPr>
-            </a:lvl9pPr>
-          </a:lstStyle>
-          <a:p>
-            <a:pPr defTabSz="914400">
-              <a:defRPr/>
-            </a:pPr>
-            <a:r>
-              <a:rPr kumimoji="1" lang="en-US" altLang="ja-JP" sz="600" kern="0" dirty="0">
-                <a:solidFill>
-                  <a:sysClr val="window" lastClr="FFFFFF"/>
-                </a:solidFill>
-                <a:latin typeface="Calibri"/>
-                <a:ea typeface="ＭＳ Ｐゴシック" panose="020B0600070205080204" pitchFamily="50" charset="-128"/>
-              </a:rPr>
-              <a:t>general</a:t>
-            </a:r>
-            <a:endParaRPr kumimoji="1" lang="ja-JP" altLang="en-US" sz="500" b="0" i="0" u="none" strike="noStrike" kern="0" cap="none" spc="0" normalizeH="0" baseline="0" noProof="0" dirty="0">
-              <a:ln>
-                <a:noFill/>
-              </a:ln>
-              <a:solidFill>
-                <a:sysClr val="window" lastClr="FFFFFF"/>
-              </a:solidFill>
-              <a:effectLst/>
-              <a:uLnTx/>
-              <a:uFillTx/>
-              <a:latin typeface="Calibri"/>
-              <a:ea typeface="ＭＳ Ｐゴシック" panose="020B0600070205080204" pitchFamily="50" charset="-128"/>
-              <a:cs typeface="+mn-cs"/>
-            </a:endParaRPr>
-          </a:p>
-        </p:txBody>
-      </p:sp>
-      <p:sp>
-        <p:nvSpPr>
-          <p:cNvPr id="224" name="正方形/長方形 180">
-            <a:extLst>
-              <a:ext uri="{FF2B5EF4-FFF2-40B4-BE49-F238E27FC236}">
-                <a16:creationId xmlns:a16="http://schemas.microsoft.com/office/drawing/2014/main" id="{DCFFE979-6827-DEBF-E7A3-737DB0B82105}"/>
-              </a:ext>
-            </a:extLst>
-          </p:cNvPr>
-          <p:cNvSpPr/>
-          <p:nvPr/>
-        </p:nvSpPr>
-        <p:spPr>
-          <a:xfrm>
-            <a:off x="2300760" y="8635396"/>
-            <a:ext cx="436816" cy="192003"/>
-          </a:xfrm>
-          <a:prstGeom prst="rect">
-            <a:avLst/>
-          </a:prstGeom>
-          <a:solidFill>
-            <a:srgbClr val="4BACC6"/>
-          </a:solidFill>
-          <a:ln w="25400" cap="flat" cmpd="sng" algn="ctr">
-            <a:solidFill>
-              <a:sysClr val="windowText" lastClr="000000"/>
-            </a:solidFill>
-            <a:prstDash val="solid"/>
-          </a:ln>
-          <a:effectLst/>
-        </p:spPr>
-        <p:txBody>
-          <a:bodyPr lIns="0" tIns="0" rIns="0" bIns="0" rtlCol="0" anchor="ctr" anchorCtr="1"/>
-          <a:lstStyle>
-            <a:lvl1pPr marL="0" indent="0">
-              <a:defRPr sz="1100">
-                <a:solidFill>
-                  <a:schemeClr val="lt1"/>
-                </a:solidFill>
-                <a:latin typeface="+mn-lt"/>
-                <a:ea typeface="+mn-ea"/>
-                <a:cs typeface="+mn-cs"/>
-              </a:defRPr>
-            </a:lvl1pPr>
-            <a:lvl2pPr marL="457200" indent="0">
-              <a:defRPr sz="1100">
-                <a:solidFill>
-                  <a:schemeClr val="lt1"/>
-                </a:solidFill>
-                <a:latin typeface="+mn-lt"/>
-                <a:ea typeface="+mn-ea"/>
-                <a:cs typeface="+mn-cs"/>
-              </a:defRPr>
-            </a:lvl2pPr>
-            <a:lvl3pPr marL="914400" indent="0">
-              <a:defRPr sz="1100">
-                <a:solidFill>
-                  <a:schemeClr val="lt1"/>
-                </a:solidFill>
-                <a:latin typeface="+mn-lt"/>
-                <a:ea typeface="+mn-ea"/>
-                <a:cs typeface="+mn-cs"/>
-              </a:defRPr>
-            </a:lvl3pPr>
-            <a:lvl4pPr marL="1371600" indent="0">
-              <a:defRPr sz="1100">
-                <a:solidFill>
-                  <a:schemeClr val="lt1"/>
-                </a:solidFill>
-                <a:latin typeface="+mn-lt"/>
-                <a:ea typeface="+mn-ea"/>
-                <a:cs typeface="+mn-cs"/>
-              </a:defRPr>
-            </a:lvl4pPr>
-            <a:lvl5pPr marL="1828800" indent="0">
-              <a:defRPr sz="1100">
-                <a:solidFill>
-                  <a:schemeClr val="lt1"/>
-                </a:solidFill>
-                <a:latin typeface="+mn-lt"/>
-                <a:ea typeface="+mn-ea"/>
-                <a:cs typeface="+mn-cs"/>
-              </a:defRPr>
-            </a:lvl5pPr>
-            <a:lvl6pPr marL="2286000" indent="0">
-              <a:defRPr sz="1100">
-                <a:solidFill>
-                  <a:schemeClr val="lt1"/>
-                </a:solidFill>
-                <a:latin typeface="+mn-lt"/>
-                <a:ea typeface="+mn-ea"/>
-                <a:cs typeface="+mn-cs"/>
-              </a:defRPr>
-            </a:lvl6pPr>
-            <a:lvl7pPr marL="2743200" indent="0">
-              <a:defRPr sz="1100">
-                <a:solidFill>
-                  <a:schemeClr val="lt1"/>
-                </a:solidFill>
-                <a:latin typeface="+mn-lt"/>
-                <a:ea typeface="+mn-ea"/>
-                <a:cs typeface="+mn-cs"/>
-              </a:defRPr>
-            </a:lvl7pPr>
-            <a:lvl8pPr marL="3200400" indent="0">
-              <a:defRPr sz="1100">
-                <a:solidFill>
-                  <a:schemeClr val="lt1"/>
-                </a:solidFill>
-                <a:latin typeface="+mn-lt"/>
-                <a:ea typeface="+mn-ea"/>
-                <a:cs typeface="+mn-cs"/>
-              </a:defRPr>
-            </a:lvl8pPr>
-            <a:lvl9pPr marL="3657600" indent="0">
-              <a:defRPr sz="1100">
-                <a:solidFill>
-                  <a:schemeClr val="lt1"/>
-                </a:solidFill>
-                <a:latin typeface="+mn-lt"/>
-                <a:ea typeface="+mn-ea"/>
-                <a:cs typeface="+mn-cs"/>
-              </a:defRPr>
-            </a:lvl9pPr>
-          </a:lstStyle>
-          <a:p>
-            <a:pPr defTabSz="914400">
-              <a:defRPr/>
-            </a:pPr>
-            <a:r>
-              <a:rPr kumimoji="1" lang="en-US" altLang="ja-JP" sz="600" kern="0" dirty="0">
-                <a:solidFill>
-                  <a:sysClr val="window" lastClr="FFFFFF"/>
-                </a:solidFill>
-                <a:latin typeface="Calibri"/>
-                <a:ea typeface="ＭＳ Ｐゴシック" panose="020B0600070205080204" pitchFamily="50" charset="-128"/>
-              </a:rPr>
-              <a:t>general</a:t>
-            </a:r>
-            <a:endParaRPr kumimoji="1" lang="ja-JP" altLang="en-US" sz="500" b="0" i="0" u="none" strike="noStrike" kern="0" cap="none" spc="0" normalizeH="0" baseline="0" noProof="0" dirty="0">
-              <a:ln>
-                <a:noFill/>
-              </a:ln>
-              <a:solidFill>
-                <a:sysClr val="window" lastClr="FFFFFF"/>
-              </a:solidFill>
-              <a:effectLst/>
-              <a:uLnTx/>
-              <a:uFillTx/>
-              <a:latin typeface="Calibri"/>
-              <a:ea typeface="ＭＳ Ｐゴシック" panose="020B0600070205080204" pitchFamily="50" charset="-128"/>
-              <a:cs typeface="+mn-cs"/>
-            </a:endParaRPr>
-          </a:p>
-        </p:txBody>
-      </p:sp>
-      <p:sp>
-        <p:nvSpPr>
-          <p:cNvPr id="225" name="正方形/長方形 180">
-            <a:extLst>
-              <a:ext uri="{FF2B5EF4-FFF2-40B4-BE49-F238E27FC236}">
-                <a16:creationId xmlns:a16="http://schemas.microsoft.com/office/drawing/2014/main" id="{DCFFE979-6827-DEBF-E7A3-737DB0B82105}"/>
-              </a:ext>
-            </a:extLst>
-          </p:cNvPr>
-          <p:cNvSpPr/>
-          <p:nvPr/>
-        </p:nvSpPr>
-        <p:spPr>
-          <a:xfrm>
-            <a:off x="2757576" y="8635396"/>
-            <a:ext cx="436816" cy="192003"/>
-          </a:xfrm>
-          <a:prstGeom prst="rect">
-            <a:avLst/>
-          </a:prstGeom>
-          <a:solidFill>
-            <a:srgbClr val="4BACC6"/>
-          </a:solidFill>
-          <a:ln w="25400" cap="flat" cmpd="sng" algn="ctr">
-            <a:solidFill>
-              <a:sysClr val="windowText" lastClr="000000"/>
-            </a:solidFill>
-            <a:prstDash val="solid"/>
-          </a:ln>
-          <a:effectLst/>
-        </p:spPr>
-        <p:txBody>
-          <a:bodyPr lIns="0" tIns="0" rIns="0" bIns="0" rtlCol="0" anchor="ctr" anchorCtr="1"/>
-          <a:lstStyle>
-            <a:lvl1pPr marL="0" indent="0">
-              <a:defRPr sz="1100">
-                <a:solidFill>
-                  <a:schemeClr val="lt1"/>
-                </a:solidFill>
-                <a:latin typeface="+mn-lt"/>
-                <a:ea typeface="+mn-ea"/>
-                <a:cs typeface="+mn-cs"/>
-              </a:defRPr>
-            </a:lvl1pPr>
-            <a:lvl2pPr marL="457200" indent="0">
-              <a:defRPr sz="1100">
-                <a:solidFill>
-                  <a:schemeClr val="lt1"/>
-                </a:solidFill>
-                <a:latin typeface="+mn-lt"/>
-                <a:ea typeface="+mn-ea"/>
-                <a:cs typeface="+mn-cs"/>
-              </a:defRPr>
-            </a:lvl2pPr>
-            <a:lvl3pPr marL="914400" indent="0">
-              <a:defRPr sz="1100">
-                <a:solidFill>
-                  <a:schemeClr val="lt1"/>
-                </a:solidFill>
-                <a:latin typeface="+mn-lt"/>
-                <a:ea typeface="+mn-ea"/>
-                <a:cs typeface="+mn-cs"/>
-              </a:defRPr>
-            </a:lvl3pPr>
-            <a:lvl4pPr marL="1371600" indent="0">
-              <a:defRPr sz="1100">
-                <a:solidFill>
-                  <a:schemeClr val="lt1"/>
-                </a:solidFill>
-                <a:latin typeface="+mn-lt"/>
-                <a:ea typeface="+mn-ea"/>
-                <a:cs typeface="+mn-cs"/>
-              </a:defRPr>
-            </a:lvl4pPr>
-            <a:lvl5pPr marL="1828800" indent="0">
-              <a:defRPr sz="1100">
-                <a:solidFill>
-                  <a:schemeClr val="lt1"/>
-                </a:solidFill>
-                <a:latin typeface="+mn-lt"/>
-                <a:ea typeface="+mn-ea"/>
-                <a:cs typeface="+mn-cs"/>
-              </a:defRPr>
-            </a:lvl5pPr>
-            <a:lvl6pPr marL="2286000" indent="0">
-              <a:defRPr sz="1100">
-                <a:solidFill>
-                  <a:schemeClr val="lt1"/>
-                </a:solidFill>
-                <a:latin typeface="+mn-lt"/>
-                <a:ea typeface="+mn-ea"/>
-                <a:cs typeface="+mn-cs"/>
-              </a:defRPr>
-            </a:lvl6pPr>
-            <a:lvl7pPr marL="2743200" indent="0">
-              <a:defRPr sz="1100">
-                <a:solidFill>
-                  <a:schemeClr val="lt1"/>
-                </a:solidFill>
-                <a:latin typeface="+mn-lt"/>
-                <a:ea typeface="+mn-ea"/>
-                <a:cs typeface="+mn-cs"/>
-              </a:defRPr>
-            </a:lvl7pPr>
-            <a:lvl8pPr marL="3200400" indent="0">
-              <a:defRPr sz="1100">
-                <a:solidFill>
-                  <a:schemeClr val="lt1"/>
-                </a:solidFill>
-                <a:latin typeface="+mn-lt"/>
-                <a:ea typeface="+mn-ea"/>
-                <a:cs typeface="+mn-cs"/>
-              </a:defRPr>
-            </a:lvl8pPr>
-            <a:lvl9pPr marL="3657600" indent="0">
-              <a:defRPr sz="1100">
-                <a:solidFill>
-                  <a:schemeClr val="lt1"/>
-                </a:solidFill>
-                <a:latin typeface="+mn-lt"/>
-                <a:ea typeface="+mn-ea"/>
-                <a:cs typeface="+mn-cs"/>
-              </a:defRPr>
-            </a:lvl9pPr>
-          </a:lstStyle>
-          <a:p>
-            <a:pPr defTabSz="914400">
-              <a:defRPr/>
-            </a:pPr>
-            <a:r>
-              <a:rPr kumimoji="1" lang="en-US" altLang="ja-JP" sz="600" kern="0" dirty="0">
-                <a:solidFill>
-                  <a:sysClr val="window" lastClr="FFFFFF"/>
-                </a:solidFill>
-                <a:latin typeface="Calibri"/>
-                <a:ea typeface="ＭＳ Ｐゴシック" panose="020B0600070205080204" pitchFamily="50" charset="-128"/>
-              </a:rPr>
-              <a:t>general</a:t>
-            </a:r>
-            <a:endParaRPr kumimoji="1" lang="ja-JP" altLang="en-US" sz="500" b="0" i="0" u="none" strike="noStrike" kern="0" cap="none" spc="0" normalizeH="0" baseline="0" noProof="0" dirty="0">
-              <a:ln>
-                <a:noFill/>
-              </a:ln>
-              <a:solidFill>
-                <a:sysClr val="window" lastClr="FFFFFF"/>
-              </a:solidFill>
-              <a:effectLst/>
-              <a:uLnTx/>
-              <a:uFillTx/>
-              <a:latin typeface="Calibri"/>
-              <a:ea typeface="ＭＳ Ｐゴシック" panose="020B0600070205080204" pitchFamily="50" charset="-128"/>
-              <a:cs typeface="+mn-cs"/>
-            </a:endParaRPr>
-          </a:p>
-        </p:txBody>
-      </p:sp>
-      <p:sp>
-        <p:nvSpPr>
-          <p:cNvPr id="226" name="正方形/長方形 180">
-            <a:extLst>
-              <a:ext uri="{FF2B5EF4-FFF2-40B4-BE49-F238E27FC236}">
-                <a16:creationId xmlns:a16="http://schemas.microsoft.com/office/drawing/2014/main" id="{DCFFE979-6827-DEBF-E7A3-737DB0B82105}"/>
-              </a:ext>
-            </a:extLst>
-          </p:cNvPr>
-          <p:cNvSpPr/>
-          <p:nvPr/>
-        </p:nvSpPr>
-        <p:spPr>
-          <a:xfrm>
-            <a:off x="3214392" y="8635396"/>
-            <a:ext cx="436816" cy="192003"/>
-          </a:xfrm>
-          <a:prstGeom prst="rect">
-            <a:avLst/>
-          </a:prstGeom>
-          <a:solidFill>
-            <a:srgbClr val="4BACC6"/>
-          </a:solidFill>
-          <a:ln w="25400" cap="flat" cmpd="sng" algn="ctr">
-            <a:solidFill>
-              <a:sysClr val="windowText" lastClr="000000"/>
-            </a:solidFill>
-            <a:prstDash val="solid"/>
-          </a:ln>
-          <a:effectLst/>
-        </p:spPr>
-        <p:txBody>
-          <a:bodyPr lIns="0" tIns="0" rIns="0" bIns="0" rtlCol="0" anchor="ctr" anchorCtr="1"/>
-          <a:lstStyle>
-            <a:lvl1pPr marL="0" indent="0">
-              <a:defRPr sz="1100">
-                <a:solidFill>
-                  <a:schemeClr val="lt1"/>
-                </a:solidFill>
-                <a:latin typeface="+mn-lt"/>
-                <a:ea typeface="+mn-ea"/>
-                <a:cs typeface="+mn-cs"/>
-              </a:defRPr>
-            </a:lvl1pPr>
-            <a:lvl2pPr marL="457200" indent="0">
-              <a:defRPr sz="1100">
-                <a:solidFill>
-                  <a:schemeClr val="lt1"/>
-                </a:solidFill>
-                <a:latin typeface="+mn-lt"/>
-                <a:ea typeface="+mn-ea"/>
-                <a:cs typeface="+mn-cs"/>
-              </a:defRPr>
-            </a:lvl2pPr>
-            <a:lvl3pPr marL="914400" indent="0">
-              <a:defRPr sz="1100">
-                <a:solidFill>
-                  <a:schemeClr val="lt1"/>
-                </a:solidFill>
-                <a:latin typeface="+mn-lt"/>
-                <a:ea typeface="+mn-ea"/>
-                <a:cs typeface="+mn-cs"/>
-              </a:defRPr>
-            </a:lvl3pPr>
-            <a:lvl4pPr marL="1371600" indent="0">
-              <a:defRPr sz="1100">
-                <a:solidFill>
-                  <a:schemeClr val="lt1"/>
-                </a:solidFill>
-                <a:latin typeface="+mn-lt"/>
-                <a:ea typeface="+mn-ea"/>
-                <a:cs typeface="+mn-cs"/>
-              </a:defRPr>
-            </a:lvl4pPr>
-            <a:lvl5pPr marL="1828800" indent="0">
-              <a:defRPr sz="1100">
-                <a:solidFill>
-                  <a:schemeClr val="lt1"/>
-                </a:solidFill>
-                <a:latin typeface="+mn-lt"/>
-                <a:ea typeface="+mn-ea"/>
-                <a:cs typeface="+mn-cs"/>
-              </a:defRPr>
-            </a:lvl5pPr>
-            <a:lvl6pPr marL="2286000" indent="0">
-              <a:defRPr sz="1100">
-                <a:solidFill>
-                  <a:schemeClr val="lt1"/>
-                </a:solidFill>
-                <a:latin typeface="+mn-lt"/>
-                <a:ea typeface="+mn-ea"/>
-                <a:cs typeface="+mn-cs"/>
-              </a:defRPr>
-            </a:lvl6pPr>
-            <a:lvl7pPr marL="2743200" indent="0">
-              <a:defRPr sz="1100">
-                <a:solidFill>
-                  <a:schemeClr val="lt1"/>
-                </a:solidFill>
-                <a:latin typeface="+mn-lt"/>
-                <a:ea typeface="+mn-ea"/>
-                <a:cs typeface="+mn-cs"/>
-              </a:defRPr>
-            </a:lvl7pPr>
-            <a:lvl8pPr marL="3200400" indent="0">
-              <a:defRPr sz="1100">
-                <a:solidFill>
-                  <a:schemeClr val="lt1"/>
-                </a:solidFill>
-                <a:latin typeface="+mn-lt"/>
-                <a:ea typeface="+mn-ea"/>
-                <a:cs typeface="+mn-cs"/>
-              </a:defRPr>
-            </a:lvl8pPr>
-            <a:lvl9pPr marL="3657600" indent="0">
-              <a:defRPr sz="1100">
-                <a:solidFill>
-                  <a:schemeClr val="lt1"/>
-                </a:solidFill>
-                <a:latin typeface="+mn-lt"/>
-                <a:ea typeface="+mn-ea"/>
-                <a:cs typeface="+mn-cs"/>
-              </a:defRPr>
-            </a:lvl9pPr>
-          </a:lstStyle>
-          <a:p>
-            <a:pPr defTabSz="914400">
-              <a:defRPr/>
-            </a:pPr>
-            <a:r>
-              <a:rPr kumimoji="1" lang="en-US" altLang="ja-JP" sz="600" kern="0" dirty="0">
-                <a:solidFill>
-                  <a:sysClr val="window" lastClr="FFFFFF"/>
-                </a:solidFill>
-                <a:latin typeface="Calibri"/>
-                <a:ea typeface="ＭＳ Ｐゴシック" panose="020B0600070205080204" pitchFamily="50" charset="-128"/>
-              </a:rPr>
-              <a:t>general</a:t>
-            </a:r>
-            <a:endParaRPr kumimoji="1" lang="ja-JP" altLang="en-US" sz="500" b="0" i="0" u="none" strike="noStrike" kern="0" cap="none" spc="0" normalizeH="0" baseline="0" noProof="0" dirty="0">
-              <a:ln>
-                <a:noFill/>
-              </a:ln>
-              <a:solidFill>
-                <a:sysClr val="window" lastClr="FFFFFF"/>
-              </a:solidFill>
-              <a:effectLst/>
-              <a:uLnTx/>
-              <a:uFillTx/>
-              <a:latin typeface="Calibri"/>
-              <a:ea typeface="ＭＳ Ｐゴシック" panose="020B0600070205080204" pitchFamily="50" charset="-128"/>
-              <a:cs typeface="+mn-cs"/>
-            </a:endParaRPr>
-          </a:p>
-        </p:txBody>
-      </p:sp>
-      <p:sp>
-        <p:nvSpPr>
-          <p:cNvPr id="227" name="正方形/長方形 180">
-            <a:extLst>
-              <a:ext uri="{FF2B5EF4-FFF2-40B4-BE49-F238E27FC236}">
-                <a16:creationId xmlns:a16="http://schemas.microsoft.com/office/drawing/2014/main" id="{DCFFE979-6827-DEBF-E7A3-737DB0B82105}"/>
-              </a:ext>
-            </a:extLst>
-          </p:cNvPr>
-          <p:cNvSpPr/>
-          <p:nvPr/>
-        </p:nvSpPr>
-        <p:spPr>
-          <a:xfrm>
-            <a:off x="3671208" y="8635396"/>
-            <a:ext cx="436816" cy="192003"/>
-          </a:xfrm>
-          <a:prstGeom prst="rect">
-            <a:avLst/>
-          </a:prstGeom>
-          <a:solidFill>
-            <a:srgbClr val="4BACC6"/>
-          </a:solidFill>
-          <a:ln w="25400" cap="flat" cmpd="sng" algn="ctr">
-            <a:solidFill>
-              <a:sysClr val="windowText" lastClr="000000"/>
-            </a:solidFill>
-            <a:prstDash val="solid"/>
-          </a:ln>
-          <a:effectLst/>
-        </p:spPr>
-        <p:txBody>
-          <a:bodyPr lIns="0" tIns="0" rIns="0" bIns="0" rtlCol="0" anchor="ctr" anchorCtr="1"/>
-          <a:lstStyle>
-            <a:lvl1pPr marL="0" indent="0">
-              <a:defRPr sz="1100">
-                <a:solidFill>
-                  <a:schemeClr val="lt1"/>
-                </a:solidFill>
-                <a:latin typeface="+mn-lt"/>
-                <a:ea typeface="+mn-ea"/>
-                <a:cs typeface="+mn-cs"/>
-              </a:defRPr>
-            </a:lvl1pPr>
-            <a:lvl2pPr marL="457200" indent="0">
-              <a:defRPr sz="1100">
-                <a:solidFill>
-                  <a:schemeClr val="lt1"/>
-                </a:solidFill>
-                <a:latin typeface="+mn-lt"/>
-                <a:ea typeface="+mn-ea"/>
-                <a:cs typeface="+mn-cs"/>
-              </a:defRPr>
-            </a:lvl2pPr>
-            <a:lvl3pPr marL="914400" indent="0">
-              <a:defRPr sz="1100">
-                <a:solidFill>
-                  <a:schemeClr val="lt1"/>
-                </a:solidFill>
-                <a:latin typeface="+mn-lt"/>
-                <a:ea typeface="+mn-ea"/>
-                <a:cs typeface="+mn-cs"/>
-              </a:defRPr>
-            </a:lvl3pPr>
-            <a:lvl4pPr marL="1371600" indent="0">
-              <a:defRPr sz="1100">
-                <a:solidFill>
-                  <a:schemeClr val="lt1"/>
-                </a:solidFill>
-                <a:latin typeface="+mn-lt"/>
-                <a:ea typeface="+mn-ea"/>
-                <a:cs typeface="+mn-cs"/>
-              </a:defRPr>
-            </a:lvl4pPr>
-            <a:lvl5pPr marL="1828800" indent="0">
-              <a:defRPr sz="1100">
-                <a:solidFill>
-                  <a:schemeClr val="lt1"/>
-                </a:solidFill>
-                <a:latin typeface="+mn-lt"/>
-                <a:ea typeface="+mn-ea"/>
-                <a:cs typeface="+mn-cs"/>
-              </a:defRPr>
-            </a:lvl5pPr>
-            <a:lvl6pPr marL="2286000" indent="0">
-              <a:defRPr sz="1100">
-                <a:solidFill>
-                  <a:schemeClr val="lt1"/>
-                </a:solidFill>
-                <a:latin typeface="+mn-lt"/>
-                <a:ea typeface="+mn-ea"/>
-                <a:cs typeface="+mn-cs"/>
-              </a:defRPr>
-            </a:lvl6pPr>
-            <a:lvl7pPr marL="2743200" indent="0">
-              <a:defRPr sz="1100">
-                <a:solidFill>
-                  <a:schemeClr val="lt1"/>
-                </a:solidFill>
-                <a:latin typeface="+mn-lt"/>
-                <a:ea typeface="+mn-ea"/>
-                <a:cs typeface="+mn-cs"/>
-              </a:defRPr>
-            </a:lvl7pPr>
-            <a:lvl8pPr marL="3200400" indent="0">
-              <a:defRPr sz="1100">
-                <a:solidFill>
-                  <a:schemeClr val="lt1"/>
-                </a:solidFill>
-                <a:latin typeface="+mn-lt"/>
-                <a:ea typeface="+mn-ea"/>
-                <a:cs typeface="+mn-cs"/>
-              </a:defRPr>
-            </a:lvl8pPr>
-            <a:lvl9pPr marL="3657600" indent="0">
-              <a:defRPr sz="1100">
-                <a:solidFill>
-                  <a:schemeClr val="lt1"/>
-                </a:solidFill>
-                <a:latin typeface="+mn-lt"/>
-                <a:ea typeface="+mn-ea"/>
-                <a:cs typeface="+mn-cs"/>
-              </a:defRPr>
-            </a:lvl9pPr>
-          </a:lstStyle>
-          <a:p>
-            <a:pPr defTabSz="914400">
-              <a:defRPr/>
-            </a:pPr>
-            <a:r>
-              <a:rPr kumimoji="1" lang="en-US" altLang="ja-JP" sz="600" kern="0" dirty="0">
-                <a:solidFill>
-                  <a:sysClr val="window" lastClr="FFFFFF"/>
-                </a:solidFill>
-                <a:latin typeface="Calibri"/>
-                <a:ea typeface="ＭＳ Ｐゴシック" panose="020B0600070205080204" pitchFamily="50" charset="-128"/>
-              </a:rPr>
-              <a:t>general</a:t>
-            </a:r>
-            <a:endParaRPr kumimoji="1" lang="ja-JP" altLang="en-US" sz="500" b="0" i="0" u="none" strike="noStrike" kern="0" cap="none" spc="0" normalizeH="0" baseline="0" noProof="0" dirty="0">
-              <a:ln>
-                <a:noFill/>
-              </a:ln>
-              <a:solidFill>
-                <a:sysClr val="window" lastClr="FFFFFF"/>
-              </a:solidFill>
-              <a:effectLst/>
-              <a:uLnTx/>
-              <a:uFillTx/>
-              <a:latin typeface="Calibri"/>
-              <a:ea typeface="ＭＳ Ｐゴシック" panose="020B0600070205080204" pitchFamily="50" charset="-128"/>
-              <a:cs typeface="+mn-cs"/>
-            </a:endParaRPr>
-          </a:p>
-        </p:txBody>
-      </p:sp>
-      <p:sp>
-        <p:nvSpPr>
-          <p:cNvPr id="228" name="正方形/長方形 186">
-            <a:extLst>
-              <a:ext uri="{FF2B5EF4-FFF2-40B4-BE49-F238E27FC236}">
-                <a16:creationId xmlns:a16="http://schemas.microsoft.com/office/drawing/2014/main" id="{691FF50D-B26B-3AE6-972B-AB9315D96FA0}"/>
-              </a:ext>
-            </a:extLst>
-          </p:cNvPr>
-          <p:cNvSpPr/>
-          <p:nvPr/>
-        </p:nvSpPr>
-        <p:spPr>
-          <a:xfrm>
-            <a:off x="2072352" y="9035396"/>
-            <a:ext cx="436816" cy="192003"/>
-          </a:xfrm>
-          <a:prstGeom prst="rect">
-            <a:avLst/>
-          </a:prstGeom>
-          <a:solidFill>
-            <a:srgbClr val="4BACC6"/>
-          </a:solidFill>
-          <a:ln w="25400" cap="flat" cmpd="sng" algn="ctr">
-            <a:solidFill>
-              <a:sysClr val="windowText" lastClr="000000"/>
-            </a:solidFill>
-            <a:prstDash val="solid"/>
-          </a:ln>
-          <a:effectLst/>
-        </p:spPr>
-        <p:txBody>
-          <a:bodyPr lIns="0" tIns="0" rIns="0" bIns="0" rtlCol="0" anchor="ctr" anchorCtr="1"/>
-          <a:lstStyle>
-            <a:lvl1pPr marL="0" indent="0">
-              <a:defRPr sz="1100">
-                <a:solidFill>
-                  <a:schemeClr val="lt1"/>
-                </a:solidFill>
-                <a:latin typeface="+mn-lt"/>
-                <a:ea typeface="+mn-ea"/>
-                <a:cs typeface="+mn-cs"/>
-              </a:defRPr>
-            </a:lvl1pPr>
-            <a:lvl2pPr marL="457200" indent="0">
-              <a:defRPr sz="1100">
-                <a:solidFill>
-                  <a:schemeClr val="lt1"/>
-                </a:solidFill>
-                <a:latin typeface="+mn-lt"/>
-                <a:ea typeface="+mn-ea"/>
-                <a:cs typeface="+mn-cs"/>
-              </a:defRPr>
-            </a:lvl2pPr>
-            <a:lvl3pPr marL="914400" indent="0">
-              <a:defRPr sz="1100">
-                <a:solidFill>
-                  <a:schemeClr val="lt1"/>
-                </a:solidFill>
-                <a:latin typeface="+mn-lt"/>
-                <a:ea typeface="+mn-ea"/>
-                <a:cs typeface="+mn-cs"/>
-              </a:defRPr>
-            </a:lvl3pPr>
-            <a:lvl4pPr marL="1371600" indent="0">
-              <a:defRPr sz="1100">
-                <a:solidFill>
-                  <a:schemeClr val="lt1"/>
-                </a:solidFill>
-                <a:latin typeface="+mn-lt"/>
-                <a:ea typeface="+mn-ea"/>
-                <a:cs typeface="+mn-cs"/>
-              </a:defRPr>
-            </a:lvl4pPr>
-            <a:lvl5pPr marL="1828800" indent="0">
-              <a:defRPr sz="1100">
-                <a:solidFill>
-                  <a:schemeClr val="lt1"/>
-                </a:solidFill>
-                <a:latin typeface="+mn-lt"/>
-                <a:ea typeface="+mn-ea"/>
-                <a:cs typeface="+mn-cs"/>
-              </a:defRPr>
-            </a:lvl5pPr>
-            <a:lvl6pPr marL="2286000" indent="0">
-              <a:defRPr sz="1100">
-                <a:solidFill>
-                  <a:schemeClr val="lt1"/>
-                </a:solidFill>
-                <a:latin typeface="+mn-lt"/>
-                <a:ea typeface="+mn-ea"/>
-                <a:cs typeface="+mn-cs"/>
-              </a:defRPr>
-            </a:lvl6pPr>
-            <a:lvl7pPr marL="2743200" indent="0">
-              <a:defRPr sz="1100">
-                <a:solidFill>
-                  <a:schemeClr val="lt1"/>
-                </a:solidFill>
-                <a:latin typeface="+mn-lt"/>
-                <a:ea typeface="+mn-ea"/>
-                <a:cs typeface="+mn-cs"/>
-              </a:defRPr>
-            </a:lvl7pPr>
-            <a:lvl8pPr marL="3200400" indent="0">
-              <a:defRPr sz="1100">
-                <a:solidFill>
-                  <a:schemeClr val="lt1"/>
-                </a:solidFill>
-                <a:latin typeface="+mn-lt"/>
-                <a:ea typeface="+mn-ea"/>
-                <a:cs typeface="+mn-cs"/>
-              </a:defRPr>
-            </a:lvl8pPr>
-            <a:lvl9pPr marL="3657600" indent="0">
-              <a:defRPr sz="1100">
-                <a:solidFill>
-                  <a:schemeClr val="lt1"/>
-                </a:solidFill>
-                <a:latin typeface="+mn-lt"/>
-                <a:ea typeface="+mn-ea"/>
-                <a:cs typeface="+mn-cs"/>
-              </a:defRPr>
-            </a:lvl9pPr>
-          </a:lstStyle>
-          <a:p>
-            <a:pPr defTabSz="914400">
-              <a:defRPr/>
-            </a:pPr>
-            <a:r>
-              <a:rPr kumimoji="1" lang="en-US" altLang="ja-JP" sz="600" kern="0" dirty="0">
-                <a:solidFill>
-                  <a:sysClr val="window" lastClr="FFFFFF"/>
-                </a:solidFill>
-                <a:latin typeface="Calibri"/>
-                <a:ea typeface="ＭＳ Ｐゴシック" panose="020B0600070205080204" pitchFamily="50" charset="-128"/>
-              </a:rPr>
-              <a:t>resource</a:t>
-            </a:r>
-            <a:endParaRPr kumimoji="1" lang="ja-JP" altLang="en-US" sz="500" b="0" i="0" u="none" strike="noStrike" kern="0" cap="none" spc="0" normalizeH="0" baseline="0" noProof="0" dirty="0">
-              <a:ln>
-                <a:noFill/>
-              </a:ln>
-              <a:solidFill>
-                <a:sysClr val="window" lastClr="FFFFFF"/>
-              </a:solidFill>
-              <a:effectLst/>
-              <a:uLnTx/>
-              <a:uFillTx/>
-              <a:latin typeface="Calibri"/>
-              <a:ea typeface="ＭＳ Ｐゴシック" panose="020B0600070205080204" pitchFamily="50" charset="-128"/>
-              <a:cs typeface="+mn-cs"/>
-            </a:endParaRPr>
-          </a:p>
-        </p:txBody>
-      </p:sp>
-      <p:sp>
-        <p:nvSpPr>
-          <p:cNvPr id="229" name="正方形/長方形 188">
-            <a:extLst>
-              <a:ext uri="{FF2B5EF4-FFF2-40B4-BE49-F238E27FC236}">
-                <a16:creationId xmlns:a16="http://schemas.microsoft.com/office/drawing/2014/main" id="{850D3B30-7CC8-BF81-BC70-9E6AB6445636}"/>
-              </a:ext>
-            </a:extLst>
-          </p:cNvPr>
-          <p:cNvSpPr/>
-          <p:nvPr/>
-        </p:nvSpPr>
-        <p:spPr>
-          <a:xfrm>
-            <a:off x="2529168" y="9035396"/>
-            <a:ext cx="436816" cy="192003"/>
-          </a:xfrm>
-          <a:prstGeom prst="rect">
-            <a:avLst/>
-          </a:prstGeom>
-          <a:solidFill>
-            <a:srgbClr val="4BACC6"/>
-          </a:solidFill>
-          <a:ln w="25400" cap="flat" cmpd="sng" algn="ctr">
-            <a:solidFill>
-              <a:sysClr val="windowText" lastClr="000000"/>
-            </a:solidFill>
-            <a:prstDash val="solid"/>
-          </a:ln>
-          <a:effectLst/>
-        </p:spPr>
-        <p:txBody>
-          <a:bodyPr lIns="0" tIns="0" rIns="0" bIns="0" rtlCol="0" anchor="ctr" anchorCtr="1"/>
-          <a:lstStyle>
-            <a:lvl1pPr marL="0" indent="0">
-              <a:defRPr sz="1100">
-                <a:solidFill>
-                  <a:schemeClr val="lt1"/>
-                </a:solidFill>
-                <a:latin typeface="+mn-lt"/>
-                <a:ea typeface="+mn-ea"/>
-                <a:cs typeface="+mn-cs"/>
-              </a:defRPr>
-            </a:lvl1pPr>
-            <a:lvl2pPr marL="457200" indent="0">
-              <a:defRPr sz="1100">
-                <a:solidFill>
-                  <a:schemeClr val="lt1"/>
-                </a:solidFill>
-                <a:latin typeface="+mn-lt"/>
-                <a:ea typeface="+mn-ea"/>
-                <a:cs typeface="+mn-cs"/>
-              </a:defRPr>
-            </a:lvl2pPr>
-            <a:lvl3pPr marL="914400" indent="0">
-              <a:defRPr sz="1100">
-                <a:solidFill>
-                  <a:schemeClr val="lt1"/>
-                </a:solidFill>
-                <a:latin typeface="+mn-lt"/>
-                <a:ea typeface="+mn-ea"/>
-                <a:cs typeface="+mn-cs"/>
-              </a:defRPr>
-            </a:lvl3pPr>
-            <a:lvl4pPr marL="1371600" indent="0">
-              <a:defRPr sz="1100">
-                <a:solidFill>
-                  <a:schemeClr val="lt1"/>
-                </a:solidFill>
-                <a:latin typeface="+mn-lt"/>
-                <a:ea typeface="+mn-ea"/>
-                <a:cs typeface="+mn-cs"/>
-              </a:defRPr>
-            </a:lvl4pPr>
-            <a:lvl5pPr marL="1828800" indent="0">
-              <a:defRPr sz="1100">
-                <a:solidFill>
-                  <a:schemeClr val="lt1"/>
-                </a:solidFill>
-                <a:latin typeface="+mn-lt"/>
-                <a:ea typeface="+mn-ea"/>
-                <a:cs typeface="+mn-cs"/>
-              </a:defRPr>
-            </a:lvl5pPr>
-            <a:lvl6pPr marL="2286000" indent="0">
-              <a:defRPr sz="1100">
-                <a:solidFill>
-                  <a:schemeClr val="lt1"/>
-                </a:solidFill>
-                <a:latin typeface="+mn-lt"/>
-                <a:ea typeface="+mn-ea"/>
-                <a:cs typeface="+mn-cs"/>
-              </a:defRPr>
-            </a:lvl6pPr>
-            <a:lvl7pPr marL="2743200" indent="0">
-              <a:defRPr sz="1100">
-                <a:solidFill>
-                  <a:schemeClr val="lt1"/>
-                </a:solidFill>
-                <a:latin typeface="+mn-lt"/>
-                <a:ea typeface="+mn-ea"/>
-                <a:cs typeface="+mn-cs"/>
-              </a:defRPr>
-            </a:lvl7pPr>
-            <a:lvl8pPr marL="3200400" indent="0">
-              <a:defRPr sz="1100">
-                <a:solidFill>
-                  <a:schemeClr val="lt1"/>
-                </a:solidFill>
-                <a:latin typeface="+mn-lt"/>
-                <a:ea typeface="+mn-ea"/>
-                <a:cs typeface="+mn-cs"/>
-              </a:defRPr>
-            </a:lvl8pPr>
-            <a:lvl9pPr marL="3657600" indent="0">
-              <a:defRPr sz="1100">
-                <a:solidFill>
-                  <a:schemeClr val="lt1"/>
-                </a:solidFill>
-                <a:latin typeface="+mn-lt"/>
-                <a:ea typeface="+mn-ea"/>
-                <a:cs typeface="+mn-cs"/>
-              </a:defRPr>
-            </a:lvl9pPr>
-          </a:lstStyle>
-          <a:p>
-            <a:pPr defTabSz="914400">
-              <a:defRPr/>
-            </a:pPr>
-            <a:r>
-              <a:rPr kumimoji="1" lang="en-US" altLang="ja-JP" sz="600" kern="0" dirty="0">
-                <a:solidFill>
-                  <a:sysClr val="window" lastClr="FFFFFF"/>
-                </a:solidFill>
-                <a:latin typeface="Calibri"/>
-                <a:ea typeface="ＭＳ Ｐゴシック" panose="020B0600070205080204" pitchFamily="50" charset="-128"/>
-              </a:rPr>
-              <a:t>resource</a:t>
-            </a:r>
-            <a:endParaRPr kumimoji="1" lang="ja-JP" altLang="en-US" sz="500" b="0" i="0" u="none" strike="noStrike" kern="0" cap="none" spc="0" normalizeH="0" baseline="0" noProof="0" dirty="0">
-              <a:ln>
-                <a:noFill/>
-              </a:ln>
-              <a:solidFill>
-                <a:sysClr val="window" lastClr="FFFFFF"/>
-              </a:solidFill>
-              <a:effectLst/>
-              <a:uLnTx/>
-              <a:uFillTx/>
-              <a:latin typeface="Calibri"/>
-              <a:ea typeface="ＭＳ Ｐゴシック" panose="020B0600070205080204" pitchFamily="50" charset="-128"/>
-              <a:cs typeface="+mn-cs"/>
-            </a:endParaRPr>
-          </a:p>
-        </p:txBody>
-      </p:sp>
-      <p:sp>
-        <p:nvSpPr>
-          <p:cNvPr id="230" name="正方形/長方形 190">
-            <a:extLst>
-              <a:ext uri="{FF2B5EF4-FFF2-40B4-BE49-F238E27FC236}">
-                <a16:creationId xmlns:a16="http://schemas.microsoft.com/office/drawing/2014/main" id="{2B7BC6FF-3A7E-2B26-F43F-C74B22D9AF96}"/>
-              </a:ext>
-            </a:extLst>
-          </p:cNvPr>
-          <p:cNvSpPr/>
-          <p:nvPr/>
-        </p:nvSpPr>
-        <p:spPr>
-          <a:xfrm>
-            <a:off x="2985984" y="9035396"/>
-            <a:ext cx="436816" cy="192003"/>
-          </a:xfrm>
-          <a:prstGeom prst="rect">
-            <a:avLst/>
-          </a:prstGeom>
-          <a:solidFill>
-            <a:srgbClr val="4BACC6"/>
-          </a:solidFill>
-          <a:ln w="25400" cap="flat" cmpd="sng" algn="ctr">
-            <a:solidFill>
-              <a:sysClr val="windowText" lastClr="000000"/>
-            </a:solidFill>
-            <a:prstDash val="solid"/>
-          </a:ln>
-          <a:effectLst/>
-        </p:spPr>
-        <p:txBody>
-          <a:bodyPr lIns="0" tIns="0" rIns="0" bIns="0" rtlCol="0" anchor="ctr" anchorCtr="1"/>
-          <a:lstStyle>
-            <a:lvl1pPr marL="0" indent="0">
-              <a:defRPr sz="1100">
-                <a:solidFill>
-                  <a:schemeClr val="lt1"/>
-                </a:solidFill>
-                <a:latin typeface="+mn-lt"/>
-                <a:ea typeface="+mn-ea"/>
-                <a:cs typeface="+mn-cs"/>
-              </a:defRPr>
-            </a:lvl1pPr>
-            <a:lvl2pPr marL="457200" indent="0">
-              <a:defRPr sz="1100">
-                <a:solidFill>
-                  <a:schemeClr val="lt1"/>
-                </a:solidFill>
-                <a:latin typeface="+mn-lt"/>
-                <a:ea typeface="+mn-ea"/>
-                <a:cs typeface="+mn-cs"/>
-              </a:defRPr>
-            </a:lvl2pPr>
-            <a:lvl3pPr marL="914400" indent="0">
-              <a:defRPr sz="1100">
-                <a:solidFill>
-                  <a:schemeClr val="lt1"/>
-                </a:solidFill>
-                <a:latin typeface="+mn-lt"/>
-                <a:ea typeface="+mn-ea"/>
-                <a:cs typeface="+mn-cs"/>
-              </a:defRPr>
-            </a:lvl3pPr>
-            <a:lvl4pPr marL="1371600" indent="0">
-              <a:defRPr sz="1100">
-                <a:solidFill>
-                  <a:schemeClr val="lt1"/>
-                </a:solidFill>
-                <a:latin typeface="+mn-lt"/>
-                <a:ea typeface="+mn-ea"/>
-                <a:cs typeface="+mn-cs"/>
-              </a:defRPr>
-            </a:lvl4pPr>
-            <a:lvl5pPr marL="1828800" indent="0">
-              <a:defRPr sz="1100">
-                <a:solidFill>
-                  <a:schemeClr val="lt1"/>
-                </a:solidFill>
-                <a:latin typeface="+mn-lt"/>
-                <a:ea typeface="+mn-ea"/>
-                <a:cs typeface="+mn-cs"/>
-              </a:defRPr>
-            </a:lvl5pPr>
-            <a:lvl6pPr marL="2286000" indent="0">
-              <a:defRPr sz="1100">
-                <a:solidFill>
-                  <a:schemeClr val="lt1"/>
-                </a:solidFill>
-                <a:latin typeface="+mn-lt"/>
-                <a:ea typeface="+mn-ea"/>
-                <a:cs typeface="+mn-cs"/>
-              </a:defRPr>
-            </a:lvl6pPr>
-            <a:lvl7pPr marL="2743200" indent="0">
-              <a:defRPr sz="1100">
-                <a:solidFill>
-                  <a:schemeClr val="lt1"/>
-                </a:solidFill>
-                <a:latin typeface="+mn-lt"/>
-                <a:ea typeface="+mn-ea"/>
-                <a:cs typeface="+mn-cs"/>
-              </a:defRPr>
-            </a:lvl7pPr>
-            <a:lvl8pPr marL="3200400" indent="0">
-              <a:defRPr sz="1100">
-                <a:solidFill>
-                  <a:schemeClr val="lt1"/>
-                </a:solidFill>
-                <a:latin typeface="+mn-lt"/>
-                <a:ea typeface="+mn-ea"/>
-                <a:cs typeface="+mn-cs"/>
-              </a:defRPr>
-            </a:lvl8pPr>
-            <a:lvl9pPr marL="3657600" indent="0">
-              <a:defRPr sz="1100">
-                <a:solidFill>
-                  <a:schemeClr val="lt1"/>
-                </a:solidFill>
-                <a:latin typeface="+mn-lt"/>
-                <a:ea typeface="+mn-ea"/>
-                <a:cs typeface="+mn-cs"/>
-              </a:defRPr>
-            </a:lvl9pPr>
-          </a:lstStyle>
-          <a:p>
-            <a:pPr defTabSz="914400">
-              <a:defRPr/>
-            </a:pPr>
-            <a:r>
-              <a:rPr kumimoji="1" lang="en-US" altLang="ja-JP" sz="600" kern="0" dirty="0">
-                <a:solidFill>
-                  <a:sysClr val="window" lastClr="FFFFFF"/>
-                </a:solidFill>
-                <a:latin typeface="Calibri"/>
-                <a:ea typeface="ＭＳ Ｐゴシック" panose="020B0600070205080204" pitchFamily="50" charset="-128"/>
-              </a:rPr>
-              <a:t>resource</a:t>
-            </a:r>
-            <a:endParaRPr kumimoji="1" lang="ja-JP" altLang="en-US" sz="500" b="0" i="0" u="none" strike="noStrike" kern="0" cap="none" spc="0" normalizeH="0" baseline="0" noProof="0" dirty="0">
-              <a:ln>
-                <a:noFill/>
-              </a:ln>
-              <a:solidFill>
-                <a:sysClr val="window" lastClr="FFFFFF"/>
-              </a:solidFill>
-              <a:effectLst/>
-              <a:uLnTx/>
-              <a:uFillTx/>
-              <a:latin typeface="Calibri"/>
-              <a:ea typeface="ＭＳ Ｐゴシック" panose="020B0600070205080204" pitchFamily="50" charset="-128"/>
-              <a:cs typeface="+mn-cs"/>
-            </a:endParaRPr>
-          </a:p>
-        </p:txBody>
-      </p:sp>
-      <p:sp>
-        <p:nvSpPr>
-          <p:cNvPr id="231" name="正方形/長方形 192">
-            <a:extLst>
-              <a:ext uri="{FF2B5EF4-FFF2-40B4-BE49-F238E27FC236}">
-                <a16:creationId xmlns:a16="http://schemas.microsoft.com/office/drawing/2014/main" id="{5CC4A228-6FFA-04E1-127D-7EAC917168BB}"/>
-              </a:ext>
-            </a:extLst>
-          </p:cNvPr>
-          <p:cNvSpPr/>
-          <p:nvPr/>
-        </p:nvSpPr>
-        <p:spPr>
-          <a:xfrm>
-            <a:off x="3442800" y="9035396"/>
-            <a:ext cx="436816" cy="192003"/>
-          </a:xfrm>
-          <a:prstGeom prst="rect">
-            <a:avLst/>
-          </a:prstGeom>
-          <a:solidFill>
-            <a:srgbClr val="4BACC6"/>
-          </a:solidFill>
-          <a:ln w="25400" cap="flat" cmpd="sng" algn="ctr">
-            <a:solidFill>
-              <a:sysClr val="windowText" lastClr="000000"/>
-            </a:solidFill>
-            <a:prstDash val="solid"/>
-          </a:ln>
-          <a:effectLst/>
-        </p:spPr>
-        <p:txBody>
-          <a:bodyPr lIns="0" tIns="0" rIns="0" bIns="0" rtlCol="0" anchor="ctr" anchorCtr="1"/>
-          <a:lstStyle>
-            <a:lvl1pPr marL="0" indent="0">
-              <a:defRPr sz="1100">
-                <a:solidFill>
-                  <a:schemeClr val="lt1"/>
-                </a:solidFill>
-                <a:latin typeface="+mn-lt"/>
-                <a:ea typeface="+mn-ea"/>
-                <a:cs typeface="+mn-cs"/>
-              </a:defRPr>
-            </a:lvl1pPr>
-            <a:lvl2pPr marL="457200" indent="0">
-              <a:defRPr sz="1100">
-                <a:solidFill>
-                  <a:schemeClr val="lt1"/>
-                </a:solidFill>
-                <a:latin typeface="+mn-lt"/>
-                <a:ea typeface="+mn-ea"/>
-                <a:cs typeface="+mn-cs"/>
-              </a:defRPr>
-            </a:lvl2pPr>
-            <a:lvl3pPr marL="914400" indent="0">
-              <a:defRPr sz="1100">
-                <a:solidFill>
-                  <a:schemeClr val="lt1"/>
-                </a:solidFill>
-                <a:latin typeface="+mn-lt"/>
-                <a:ea typeface="+mn-ea"/>
-                <a:cs typeface="+mn-cs"/>
-              </a:defRPr>
-            </a:lvl3pPr>
-            <a:lvl4pPr marL="1371600" indent="0">
-              <a:defRPr sz="1100">
-                <a:solidFill>
-                  <a:schemeClr val="lt1"/>
-                </a:solidFill>
-                <a:latin typeface="+mn-lt"/>
-                <a:ea typeface="+mn-ea"/>
-                <a:cs typeface="+mn-cs"/>
-              </a:defRPr>
-            </a:lvl4pPr>
-            <a:lvl5pPr marL="1828800" indent="0">
-              <a:defRPr sz="1100">
-                <a:solidFill>
-                  <a:schemeClr val="lt1"/>
-                </a:solidFill>
-                <a:latin typeface="+mn-lt"/>
-                <a:ea typeface="+mn-ea"/>
-                <a:cs typeface="+mn-cs"/>
-              </a:defRPr>
-            </a:lvl5pPr>
-            <a:lvl6pPr marL="2286000" indent="0">
-              <a:defRPr sz="1100">
-                <a:solidFill>
-                  <a:schemeClr val="lt1"/>
-                </a:solidFill>
-                <a:latin typeface="+mn-lt"/>
-                <a:ea typeface="+mn-ea"/>
-                <a:cs typeface="+mn-cs"/>
-              </a:defRPr>
-            </a:lvl6pPr>
-            <a:lvl7pPr marL="2743200" indent="0">
-              <a:defRPr sz="1100">
-                <a:solidFill>
-                  <a:schemeClr val="lt1"/>
-                </a:solidFill>
-                <a:latin typeface="+mn-lt"/>
-                <a:ea typeface="+mn-ea"/>
-                <a:cs typeface="+mn-cs"/>
-              </a:defRPr>
-            </a:lvl7pPr>
-            <a:lvl8pPr marL="3200400" indent="0">
-              <a:defRPr sz="1100">
-                <a:solidFill>
-                  <a:schemeClr val="lt1"/>
-                </a:solidFill>
-                <a:latin typeface="+mn-lt"/>
-                <a:ea typeface="+mn-ea"/>
-                <a:cs typeface="+mn-cs"/>
-              </a:defRPr>
-            </a:lvl8pPr>
-            <a:lvl9pPr marL="3657600" indent="0">
-              <a:defRPr sz="1100">
-                <a:solidFill>
-                  <a:schemeClr val="lt1"/>
-                </a:solidFill>
-                <a:latin typeface="+mn-lt"/>
-                <a:ea typeface="+mn-ea"/>
-                <a:cs typeface="+mn-cs"/>
-              </a:defRPr>
-            </a:lvl9pPr>
-          </a:lstStyle>
-          <a:p>
-            <a:pPr defTabSz="914400">
-              <a:defRPr/>
-            </a:pPr>
-            <a:r>
-              <a:rPr kumimoji="1" lang="en-US" altLang="ja-JP" sz="600" kern="0" dirty="0">
-                <a:solidFill>
-                  <a:sysClr val="window" lastClr="FFFFFF"/>
-                </a:solidFill>
-                <a:latin typeface="Calibri"/>
-                <a:ea typeface="ＭＳ Ｐゴシック" panose="020B0600070205080204" pitchFamily="50" charset="-128"/>
-              </a:rPr>
-              <a:t>resource</a:t>
-            </a:r>
-            <a:endParaRPr kumimoji="1" lang="ja-JP" altLang="en-US" sz="500" b="0" i="0" u="none" strike="noStrike" kern="0" cap="none" spc="0" normalizeH="0" baseline="0" noProof="0" dirty="0">
-              <a:ln>
-                <a:noFill/>
-              </a:ln>
-              <a:solidFill>
-                <a:sysClr val="window" lastClr="FFFFFF"/>
-              </a:solidFill>
-              <a:effectLst/>
-              <a:uLnTx/>
-              <a:uFillTx/>
-              <a:latin typeface="Calibri"/>
-              <a:ea typeface="ＭＳ Ｐゴシック" panose="020B0600070205080204" pitchFamily="50" charset="-128"/>
-              <a:cs typeface="+mn-cs"/>
-            </a:endParaRPr>
-          </a:p>
-        </p:txBody>
-      </p:sp>
-      <p:sp>
-        <p:nvSpPr>
-          <p:cNvPr id="232" name="テキスト ボックス 144">
-            <a:extLst>
-              <a:ext uri="{FF2B5EF4-FFF2-40B4-BE49-F238E27FC236}">
-                <a16:creationId xmlns:a16="http://schemas.microsoft.com/office/drawing/2014/main" id="{6451F370-7251-CA17-6373-FA7B8E90DF8F}"/>
-              </a:ext>
-            </a:extLst>
-          </p:cNvPr>
-          <p:cNvSpPr txBox="1"/>
-          <p:nvPr/>
-        </p:nvSpPr>
-        <p:spPr>
-          <a:xfrm>
-            <a:off x="2072352" y="9250396"/>
-            <a:ext cx="2600000" cy="80791"/>
-          </a:xfrm>
-          <a:prstGeom prst="rect">
-            <a:avLst/>
-          </a:prstGeom>
-          <a:noFill/>
-        </p:spPr>
-        <p:txBody>
-          <a:bodyPr wrap="none" lIns="0" tIns="0" rIns="0" bIns="0">
-            <a:spAutoFit/>
-          </a:bodyPr>
-          <a:lstStyle/>
-          <a:p>
-            <a:pPr algn="l" fontAlgn="ctr">
-              <a:lnSpc>
-                <a:spcPts val="600"/>
-              </a:lnSpc>
-              <a:buNone/>
-            </a:pPr>
-            <a:r>
-              <a:rPr lang="en-GB" altLang="ja-JP" sz="600" u="none" strike="noStrike" dirty="0">
-                <a:effectLst/>
-                <a:latin typeface="Meiryo UI" panose="020B0604030504040204" pitchFamily="50" charset="-128"/>
-                <a:ea typeface="Meiryo UI" panose="020B0604030504040204" pitchFamily="50" charset="-128"/>
-              </a:rPr>
-              <a:t>TS（29日）のみ前方の登壇者席（6名＋モデレーター＋Co-chair）。他のセッションは2列目・教室型に名札付き</a:t>
-            </a:r>
-          </a:p>
-        </p:txBody>
-      </p:sp>
-      <p:sp>
-        <p:nvSpPr>
           <p:cNvPr id="233" name="TextBox 232"/>
           <p:cNvSpPr txBox="1"/>
           <p:nvPr/>
@@ -15156,7 +13676,7 @@
           <a:p>
             <a:r>
               <a:rPr sz="650"/>
-              <a:t>配席案 10/1（荒木田）: U 字上端＝左 Singapore×2、右 ADRC×2（三浦センター長・北本理事）。Singapore の後は Azerbaijan からアルファベット順（左脚→底→右脚）、Japan は底（仙台市を後方に）、Armenia のみ右脚（ADRC の隣）、AUS・NZ は右脚上部。2 列目は各国の後ろ（ROK 3 人目は教室型）。事務局 8 席と AV 卓は Expo 図面 V4（10/1、AV 卓が前方右）に合わせて右上へ移す提案中（Sylvia 宛 10/1）。V4 では前方にステージ（登壇者卓 2・8 席）、教室型 3 列 30 席＋シアター 54 席。* は卓上マイク。前方登壇者席は TS のみ。</a:t>
+              <a:t>配席案 10/1（荒木田、Expo 図面 V4 に対応）: 会場は Peridot 204-206（図面表記、要確認）。前方はステージ上の登壇者卓 2（計 8 席）、U 字 28、側面列 12＋12（事務局 8 席を右上へ提案中）、教室型 3 列 30 席、シアター 54 席。U 字上端＝左 Singapore×2、右 ADRC×2（三浦センター長・北本理事）。Singapore の後は Azerbaijan からアルファベット順（左脚→底→右脚）、Japan は底（仙台市を後方に）、Armenia のみ右脚（ADRC の隣）、AUS・NZ は右脚上部。2 列目は各国の後ろ（ROK 3 人目は教室型）。* は卓上マイク（RT 発言用: Google・仙台副市長）。</a:t>
             </a:r>
           </a:p>
           <a:p>
@@ -15370,7 +13890,7 @@
         </p:nvSpPr>
         <p:spPr>
           <a:xfrm rot="5400000">
-            <a:off x="800508" y="3794491"/>
+            <a:off x="5760000" y="3744000"/>
             <a:ext cx="470376" cy="178614"/>
           </a:xfrm>
           <a:prstGeom prst="rect">
@@ -15547,7 +14067,7 @@
         </p:nvSpPr>
         <p:spPr>
           <a:xfrm rot="5400000">
-            <a:off x="1135825" y="3780647"/>
+            <a:off x="5256000" y="3744000"/>
             <a:ext cx="470376" cy="178614"/>
           </a:xfrm>
           <a:prstGeom prst="rect">
@@ -15724,7 +14244,7 @@
         </p:nvSpPr>
         <p:spPr>
           <a:xfrm rot="5400000">
-            <a:off x="1135750" y="3283932"/>
+            <a:off x="5256000" y="3240000"/>
             <a:ext cx="470376" cy="178614"/>
           </a:xfrm>
           <a:prstGeom prst="rect">
@@ -16756,6 +15276,241 @@
                 <a:ea typeface="Meiryo UI" panose="020B0604030504040204" pitchFamily="50" charset="-128"/>
               </a:rPr>
               <a:t>ROK</a:t>
+            </a:r>
+          </a:p>
+        </p:txBody>
+      </p:sp>
+      <p:pic>
+        <p:nvPicPr>
+          <p:cNvPr id="234" name="Picture 233" descr="v4_room.png"/>
+          <p:cNvPicPr>
+            <a:picLocks noChangeAspect="1"/>
+          </p:cNvPicPr>
+          <p:nvPr/>
+        </p:nvPicPr>
+        <p:blipFill>
+          <a:blip r:embed="rId3"/>
+          <a:stretch>
+            <a:fillRect/>
+          </a:stretch>
+        </p:blipFill>
+        <p:spPr>
+          <a:xfrm>
+            <a:off x="2267807" y="452000"/>
+            <a:ext cx="2322385" cy="2921240"/>
+          </a:xfrm>
+          <a:prstGeom prst="rect">
+            <a:avLst/>
+          </a:prstGeom>
+        </p:spPr>
+      </p:pic>
+      <p:sp>
+        <p:nvSpPr>
+          <p:cNvPr id="235" name="TextBox 234"/>
+          <p:cNvSpPr txBox="1"/>
+          <p:nvPr/>
+        </p:nvSpPr>
+        <p:spPr>
+          <a:xfrm>
+            <a:off x="1655999" y="3096000"/>
+            <a:ext cx="1980000" cy="180000"/>
+          </a:xfrm>
+          <a:prstGeom prst="rect">
+            <a:avLst/>
+          </a:prstGeom>
+          <a:noFill/>
+        </p:spPr>
+        <p:txBody>
+          <a:bodyPr wrap="square">
+            <a:spAutoFit/>
+          </a:bodyPr>
+          <a:lstStyle/>
+          <a:p>
+            <a:r>
+              <a:rPr sz="800" b="1"/>
+              <a:t>STAGE（32ft×12ft×2ftH）</a:t>
+            </a:r>
+          </a:p>
+        </p:txBody>
+      </p:sp>
+      <p:sp>
+        <p:nvSpPr>
+          <p:cNvPr id="236" name="TextBox 235"/>
+          <p:cNvSpPr txBox="1"/>
+          <p:nvPr/>
+        </p:nvSpPr>
+        <p:spPr>
+          <a:xfrm>
+            <a:off x="1584000" y="3798000"/>
+            <a:ext cx="2088000" cy="180000"/>
+          </a:xfrm>
+          <a:prstGeom prst="rect">
+            <a:avLst/>
+          </a:prstGeom>
+          <a:noFill/>
+        </p:spPr>
+        <p:txBody>
+          <a:bodyPr wrap="square">
+            <a:spAutoFit/>
+          </a:bodyPr>
+          <a:lstStyle/>
+          <a:p>
+            <a:r>
+              <a:rPr sz="700" b="0"/>
+              <a:t>左卓: 28日＝MC／モデレーター、29日＝モデレーター＋Co-Chair</a:t>
+            </a:r>
+          </a:p>
+        </p:txBody>
+      </p:sp>
+      <p:sp>
+        <p:nvSpPr>
+          <p:cNvPr id="237" name="TextBox 236"/>
+          <p:cNvSpPr txBox="1"/>
+          <p:nvPr/>
+        </p:nvSpPr>
+        <p:spPr>
+          <a:xfrm>
+            <a:off x="3744000" y="3798000"/>
+            <a:ext cx="1620000" cy="180000"/>
+          </a:xfrm>
+          <a:prstGeom prst="rect">
+            <a:avLst/>
+          </a:prstGeom>
+          <a:noFill/>
+        </p:spPr>
+        <p:txBody>
+          <a:bodyPr wrap="square">
+            <a:spAutoFit/>
+          </a:bodyPr>
+          <a:lstStyle/>
+          <a:p>
+            <a:r>
+              <a:rPr sz="700" b="0"/>
+              <a:t>右卓: 28日＝空席、29日＝登壇者6名</a:t>
+            </a:r>
+          </a:p>
+        </p:txBody>
+      </p:sp>
+      <p:sp>
+        <p:nvSpPr>
+          <p:cNvPr id="238" name="TextBox 237"/>
+          <p:cNvSpPr txBox="1"/>
+          <p:nvPr/>
+        </p:nvSpPr>
+        <p:spPr>
+          <a:xfrm>
+            <a:off x="3744000" y="3096000"/>
+            <a:ext cx="1512000" cy="288000"/>
+          </a:xfrm>
+          <a:prstGeom prst="rect">
+            <a:avLst/>
+          </a:prstGeom>
+          <a:noFill/>
+        </p:spPr>
+        <p:txBody>
+          <a:bodyPr wrap="square">
+            <a:spAutoFit/>
+          </a:bodyPr>
+          <a:lstStyle/>
+          <a:p>
+            <a:r>
+              <a:rPr sz="700" b="0">
+                <a:solidFill>
+                  <a:srgbClr val="C80000"/>
+                </a:solidFill>
+              </a:rPr>
+              <a:t>演台: Opening/Closing は中央、他はそで（AV側）</a:t>
+            </a:r>
+          </a:p>
+        </p:txBody>
+      </p:sp>
+      <p:sp>
+        <p:nvSpPr>
+          <p:cNvPr id="239" name="TextBox 238"/>
+          <p:cNvSpPr txBox="1"/>
+          <p:nvPr/>
+        </p:nvSpPr>
+        <p:spPr>
+          <a:xfrm>
+            <a:off x="1800000" y="8640000"/>
+            <a:ext cx="3240000" cy="180000"/>
+          </a:xfrm>
+          <a:prstGeom prst="rect">
+            <a:avLst/>
+          </a:prstGeom>
+          <a:noFill/>
+        </p:spPr>
+        <p:txBody>
+          <a:bodyPr wrap="square">
+            <a:spAutoFit/>
+          </a:bodyPr>
+          <a:lstStyle/>
+          <a:p>
+            <a:r>
+              <a:rPr sz="800" b="1"/>
+              <a:t>シアター席 54（3 ブロック×18、SEPDM オブザーバー等、名札なし）</a:t>
+            </a:r>
+          </a:p>
+        </p:txBody>
+      </p:sp>
+      <p:sp>
+        <p:nvSpPr>
+          <p:cNvPr id="240" name="TextBox 239"/>
+          <p:cNvSpPr txBox="1"/>
+          <p:nvPr/>
+        </p:nvSpPr>
+        <p:spPr>
+          <a:xfrm>
+            <a:off x="5256000" y="4572000"/>
+            <a:ext cx="1512000" cy="360000"/>
+          </a:xfrm>
+          <a:prstGeom prst="rect">
+            <a:avLst/>
+          </a:prstGeom>
+          <a:noFill/>
+        </p:spPr>
+        <p:txBody>
+          <a:bodyPr wrap="square">
+            <a:spAutoFit/>
+          </a:bodyPr>
+          <a:lstStyle/>
+          <a:p>
+            <a:r>
+              <a:rPr sz="700" b="0">
+                <a:solidFill>
+                  <a:srgbClr val="1F3864"/>
+                </a:solidFill>
+              </a:rPr>
+              <a:t>事務局 8 席（右側面列上端＋壁沿い卓、AV 卓の隣）を Expo に提案中（10/1）</a:t>
+            </a:r>
+          </a:p>
+        </p:txBody>
+      </p:sp>
+      <p:sp>
+        <p:nvSpPr>
+          <p:cNvPr id="241" name="TextBox 240"/>
+          <p:cNvSpPr txBox="1"/>
+          <p:nvPr/>
+        </p:nvSpPr>
+        <p:spPr>
+          <a:xfrm>
+            <a:off x="360000" y="3096000"/>
+            <a:ext cx="1188000" cy="288000"/>
+          </a:xfrm>
+          <a:prstGeom prst="rect">
+            <a:avLst/>
+          </a:prstGeom>
+          <a:noFill/>
+        </p:spPr>
+        <p:txBody>
+          <a:bodyPr wrap="square">
+            <a:spAutoFit/>
+          </a:bodyPr>
+          <a:lstStyle/>
+          <a:p>
+            <a:r>
+              <a:rPr sz="800" b="1"/>
+              <a:t>Peridot 204-206（Expo 図面 V4、10/1）</a:t>
             </a:r>
           </a:p>
         </p:txBody>
